--- a/prizes_presentation.pptx
+++ b/prizes_presentation.pptx
@@ -4053,7 +4053,7 @@
                         </a:defRPr>
                       </a:pPr>
                       <a:r>
-                        <a:t>6th - 10th (each)</a:t>
+                        <a:t>6th-10th (each)</a:t>
                       </a:r>
                     </a:p>
                   </a:txBody>
@@ -5218,7 +5218,7 @@
                         </a:defRPr>
                       </a:pPr>
                       <a:r>
-                        <a:t>6th - 10th</a:t>
+                        <a:t>6th-10th</a:t>
                       </a:r>
                     </a:p>
                   </a:txBody>

--- a/prizes_presentation.pptx
+++ b/prizes_presentation.pptx
@@ -3424,7 +3424,7 @@
               </a:defRPr>
             </a:pPr>
             <a:r>
-              <a:t>•  1st Place Veteran: RM 1,500</a:t>
+              <a:t>•  1st Place Veteran: RM 2,000 (Same as Open)</a:t>
             </a:r>
           </a:p>
           <a:p>
@@ -3752,7 +3752,7 @@
               </a:defRPr>
             </a:pPr>
             <a:r>
-              <a:t>•  1st Place Veteran: RM 800</a:t>
+              <a:t>•  1st Place Veteran: RM 1,000 (Same as Open)</a:t>
             </a:r>
           </a:p>
           <a:p>
@@ -4273,7 +4273,7 @@
                         </a:defRPr>
                       </a:pPr>
                       <a:r>
-                        <a:t>RM 1,500</a:t>
+                        <a:t>RM 2,000</a:t>
                       </a:r>
                     </a:p>
                   </a:txBody>
@@ -4297,7 +4297,7 @@
                         </a:defRPr>
                       </a:pPr>
                       <a:r>
-                        <a:t>RM 900</a:t>
+                        <a:t>RM 1,200</a:t>
                       </a:r>
                     </a:p>
                   </a:txBody>
@@ -4321,7 +4321,7 @@
                         </a:defRPr>
                       </a:pPr>
                       <a:r>
-                        <a:t>RM 600</a:t>
+                        <a:t>RM 800</a:t>
                       </a:r>
                     </a:p>
                   </a:txBody>
@@ -4345,7 +4345,7 @@
                         </a:defRPr>
                       </a:pPr>
                       <a:r>
-                        <a:t>RM 400</a:t>
+                        <a:t>RM 500</a:t>
                       </a:r>
                     </a:p>
                   </a:txBody>
@@ -4369,7 +4369,7 @@
                         </a:defRPr>
                       </a:pPr>
                       <a:r>
-                        <a:t>RM 250</a:t>
+                        <a:t>RM 300</a:t>
                       </a:r>
                     </a:p>
                   </a:txBody>
@@ -4393,7 +4393,7 @@
                         </a:defRPr>
                       </a:pPr>
                       <a:r>
-                        <a:t>RM 120</a:t>
+                        <a:t>RM 150</a:t>
                       </a:r>
                     </a:p>
                   </a:txBody>
@@ -4783,7 +4783,7 @@
                         </a:defRPr>
                       </a:pPr>
                       <a:r>
-                        <a:t>RM 800</a:t>
+                        <a:t>RM 1,000</a:t>
                       </a:r>
                     </a:p>
                   </a:txBody>
@@ -4807,7 +4807,7 @@
                         </a:defRPr>
                       </a:pPr>
                       <a:r>
-                        <a:t>RM 500</a:t>
+                        <a:t>RM 600</a:t>
                       </a:r>
                     </a:p>
                   </a:txBody>
@@ -4831,7 +4831,7 @@
                         </a:defRPr>
                       </a:pPr>
                       <a:r>
-                        <a:t>RM 300</a:t>
+                        <a:t>RM 400</a:t>
                       </a:r>
                     </a:p>
                   </a:txBody>
@@ -4855,7 +4855,7 @@
                         </a:defRPr>
                       </a:pPr>
                       <a:r>
-                        <a:t>RM 200</a:t>
+                        <a:t>RM 250</a:t>
                       </a:r>
                     </a:p>
                   </a:txBody>
@@ -4879,7 +4879,7 @@
                         </a:defRPr>
                       </a:pPr>
                       <a:r>
-                        <a:t>RM 120</a:t>
+                        <a:t>RM 150</a:t>
                       </a:r>
                     </a:p>
                   </a:txBody>
@@ -4903,7 +4903,7 @@
                         </a:defRPr>
                       </a:pPr>
                       <a:r>
-                        <a:t>RM 60</a:t>
+                        <a:t>RM 80</a:t>
                       </a:r>
                     </a:p>
                   </a:txBody>
@@ -4949,7 +4949,7 @@
               </a:defRPr>
             </a:pPr>
             <a:r>
-              <a:t>Total Cash Prize Budget Required (Option A): RM 31,640</a:t>
+              <a:t>Total Cash Prize Budget Required (Option A): RM 35,400</a:t>
             </a:r>
           </a:p>
         </p:txBody>
@@ -5438,7 +5438,7 @@
                         </a:defRPr>
                       </a:pPr>
                       <a:r>
-                        <a:t>RM 1,500</a:t>
+                        <a:t>RM 2,000</a:t>
                       </a:r>
                     </a:p>
                   </a:txBody>
@@ -5462,7 +5462,7 @@
                         </a:defRPr>
                       </a:pPr>
                       <a:r>
-                        <a:t>RM 900</a:t>
+                        <a:t>RM 1,200</a:t>
                       </a:r>
                     </a:p>
                   </a:txBody>
@@ -5486,7 +5486,7 @@
                         </a:defRPr>
                       </a:pPr>
                       <a:r>
-                        <a:t>RM 600</a:t>
+                        <a:t>RM 800</a:t>
                       </a:r>
                     </a:p>
                   </a:txBody>
@@ -5510,7 +5510,7 @@
                         </a:defRPr>
                       </a:pPr>
                       <a:r>
-                        <a:t>RM 400</a:t>
+                        <a:t>RM 500</a:t>
                       </a:r>
                     </a:p>
                   </a:txBody>
@@ -5534,7 +5534,7 @@
                         </a:defRPr>
                       </a:pPr>
                       <a:r>
-                        <a:t>RM 250</a:t>
+                        <a:t>RM 300</a:t>
                       </a:r>
                     </a:p>
                   </a:txBody>
@@ -5948,7 +5948,7 @@
                         </a:defRPr>
                       </a:pPr>
                       <a:r>
-                        <a:t>RM 800</a:t>
+                        <a:t>RM 1,000</a:t>
                       </a:r>
                     </a:p>
                   </a:txBody>
@@ -5972,7 +5972,7 @@
                         </a:defRPr>
                       </a:pPr>
                       <a:r>
-                        <a:t>RM 500</a:t>
+                        <a:t>RM 600</a:t>
                       </a:r>
                     </a:p>
                   </a:txBody>
@@ -5996,7 +5996,7 @@
                         </a:defRPr>
                       </a:pPr>
                       <a:r>
-                        <a:t>RM 300</a:t>
+                        <a:t>RM 400</a:t>
                       </a:r>
                     </a:p>
                   </a:txBody>
@@ -6020,7 +6020,7 @@
                         </a:defRPr>
                       </a:pPr>
                       <a:r>
-                        <a:t>RM 200</a:t>
+                        <a:t>RM 250</a:t>
                       </a:r>
                     </a:p>
                   </a:txBody>
@@ -6044,7 +6044,7 @@
                         </a:defRPr>
                       </a:pPr>
                       <a:r>
-                        <a:t>RM 120</a:t>
+                        <a:t>RM 150</a:t>
                       </a:r>
                     </a:p>
                   </a:txBody>
@@ -6114,7 +6114,7 @@
               </a:defRPr>
             </a:pPr>
             <a:r>
-              <a:t>Total Cash Prize Budget Required (Option B): RM 25,440</a:t>
+              <a:t>Total Cash Prize Budget Required (Option B): RM 30,800</a:t>
             </a:r>
           </a:p>
         </p:txBody>
@@ -6289,7 +6289,7 @@
               </a:defRPr>
             </a:pPr>
             <a:r>
-              <a:t>Total Budget: RM 31,640</a:t>
+              <a:t>Total Budget: RM 35,400</a:t>
             </a:r>
           </a:p>
           <a:p>
@@ -6406,7 +6406,7 @@
               </a:defRPr>
             </a:pPr>
             <a:r>
-              <a:t>Total Budget: RM 25,440</a:t>
+              <a:t>Total Budget: RM 30,800</a:t>
             </a:r>
           </a:p>
           <a:p>
@@ -6422,7 +6422,7 @@
               </a:defRPr>
             </a:pPr>
             <a:r>
-              <a:t>• Saves RM 6,200 (19.6% reduction in total prize pool).</a:t>
+              <a:t>• Saves RM 4,600 (13.0% reduction in total prize pool).</a:t>
             </a:r>
             <a:br/>
             <a:r>
@@ -6526,7 +6526,7 @@
               </a:defRPr>
             </a:pPr>
             <a:r>
-              <a:t>For an event targeting 8,000 participants, Option A is highly recommended. The additional RM 6,200 required to pay cash down to 10th place is easily offset by the incremental ticket revenue from competitive running clubs. By advertising cash prizes up to 10th place, you establish the event as a premier competitive milestone on the national calendar.</a:t>
+              <a:t>For an event targeting 8,000 participants, Option A is highly recommended. The additional RM 4,600 required to pay cash down to 10th place is easily offset by the incremental ticket revenue from competitive running clubs. By advertising cash prizes up to 10th place, you establish the event as a premier competitive milestone on the national calendar.</a:t>
             </a:r>
           </a:p>
         </p:txBody>
